--- a/output/education/archive/2026-03-25_ai-clinical-reasoning/ai-clinical-reasoning_slides_residents.pptx
+++ b/output/education/archive/2026-03-25_ai-clinical-reasoning/ai-clinical-reasoning_slides_residents.pptx
@@ -3147,7 +3147,9 @@
           <a:bodyPr rtlCol="0" anchor="ctr"/>
           <a:lstStyle/>
           <a:p>
-            <a:pPr algn="ctr"/>
+            <a:pPr algn="ctr">
+              <a:defRPr/>
+            </a:pPr>
           </a:p>
         </p:txBody>
       </p:sp>
@@ -3181,6 +3183,7 @@
               </a:defRPr>
             </a:pPr>
             <a:r>
+              <a:rPr/>
               <a:t>AIは診断を助けるか？</a:t>
             </a:r>
           </a:p>
@@ -3216,10 +3219,12 @@
               </a:defRPr>
             </a:pPr>
             <a:r>
+              <a:rPr/>
               <a:t>臨床推論の認知バイアスと</a:t>
             </a:r>
             <a:br/>
             <a:r>
+              <a:rPr/>
               <a:t>AI仮想患者の可能性と限界</a:t>
             </a:r>
           </a:p>
@@ -3255,6 +3260,7 @@
               </a:defRPr>
             </a:pPr>
             <a:r>
+              <a:rPr/>
               <a:t>研修医・専攻医向け勉強会  |  30分  |  2026-03-25</a:t>
             </a:r>
           </a:p>
@@ -3290,6 +3296,7 @@
               </a:defRPr>
             </a:pPr>
             <a:r>
+              <a:rPr/>
               <a:t>Learning Design Lab</a:t>
             </a:r>
           </a:p>
@@ -3351,6 +3358,7 @@
               </a:defRPr>
             </a:pPr>
             <a:r>
+              <a:rPr/>
               <a:t>Learning Design Lab  |  2026-03-25  |  AIは診断を助けるか？</a:t>
             </a:r>
           </a:p>
@@ -3365,7 +3373,7 @@
         <p:spPr>
           <a:xfrm>
             <a:off x="731520" y="274320"/>
-            <a:ext cx="10972800" cy="548640"/>
+            <a:ext cx="10972800" cy="589279"/>
           </a:xfrm>
           <a:prstGeom prst="rect">
             <a:avLst/>
@@ -3386,6 +3394,7 @@
               </a:defRPr>
             </a:pPr>
             <a:r>
+              <a:rPr/>
               <a:t>なぜ「会話的忠実度」が低いのか？</a:t>
             </a:r>
           </a:p>
@@ -3399,8 +3408,8 @@
         </p:nvSpPr>
         <p:spPr>
           <a:xfrm>
-            <a:off x="731520" y="822960"/>
-            <a:ext cx="10972800" cy="274320"/>
+            <a:off x="731520" y="881887"/>
+            <a:ext cx="10972800" cy="340360"/>
           </a:xfrm>
           <a:prstGeom prst="rect">
             <a:avLst/>
@@ -3421,6 +3430,7 @@
               </a:defRPr>
             </a:pPr>
             <a:r>
+              <a:rPr/>
               <a:t>Aziz (2026) の Systems &amp; Complexity Lifecycle で理解する</a:t>
             </a:r>
           </a:p>
@@ -3465,7 +3475,9 @@
           <a:bodyPr rtlCol="0" anchor="ctr"/>
           <a:lstStyle/>
           <a:p>
-            <a:pPr algn="ctr"/>
+            <a:pPr algn="ctr">
+              <a:defRPr/>
+            </a:pPr>
           </a:p>
         </p:txBody>
       </p:sp>
@@ -3508,7 +3520,9 @@
           <a:bodyPr rtlCol="0" anchor="ctr"/>
           <a:lstStyle/>
           <a:p>
-            <a:pPr algn="ctr"/>
+            <a:pPr algn="ctr">
+              <a:defRPr/>
+            </a:pPr>
           </a:p>
         </p:txBody>
       </p:sp>
@@ -3521,7 +3535,7 @@
         <p:spPr>
           <a:xfrm>
             <a:off x="1005840" y="1463040"/>
-            <a:ext cx="2103120" cy="365760"/>
+            <a:ext cx="2103120" cy="375920"/>
           </a:xfrm>
           <a:prstGeom prst="rect">
             <a:avLst/>
@@ -3542,6 +3556,7 @@
               </a:defRPr>
             </a:pPr>
             <a:r>
+              <a:rPr/>
               <a:t>Stage 1</a:t>
             </a:r>
           </a:p>
@@ -3555,8 +3570,8 @@
         </p:nvSpPr>
         <p:spPr>
           <a:xfrm>
-            <a:off x="1005840" y="1828800"/>
-            <a:ext cx="2103120" cy="365760"/>
+            <a:off x="1005840" y="1857248"/>
+            <a:ext cx="2103120" cy="411479"/>
           </a:xfrm>
           <a:prstGeom prst="rect">
             <a:avLst/>
@@ -3577,6 +3592,7 @@
               </a:defRPr>
             </a:pPr>
             <a:r>
+              <a:rPr/>
               <a:t>安定・恒常性</a:t>
             </a:r>
           </a:p>
@@ -3612,10 +3628,12 @@
               </a:defRPr>
             </a:pPr>
             <a:r>
+              <a:rPr/>
               <a:t>予測可能</a:t>
             </a:r>
             <a:br/>
             <a:r>
+              <a:rPr/>
               <a:t>ルールベース</a:t>
             </a:r>
           </a:p>
@@ -3660,7 +3678,9 @@
           <a:bodyPr rtlCol="0" anchor="ctr"/>
           <a:lstStyle/>
           <a:p>
-            <a:pPr algn="ctr"/>
+            <a:pPr algn="ctr">
+              <a:defRPr/>
+            </a:pPr>
           </a:p>
         </p:txBody>
       </p:sp>
@@ -3703,7 +3723,9 @@
           <a:bodyPr rtlCol="0" anchor="ctr"/>
           <a:lstStyle/>
           <a:p>
-            <a:pPr algn="ctr"/>
+            <a:pPr algn="ctr">
+              <a:defRPr/>
+            </a:pPr>
           </a:p>
         </p:txBody>
       </p:sp>
@@ -3716,7 +3738,7 @@
         <p:spPr>
           <a:xfrm>
             <a:off x="3840480" y="1463040"/>
-            <a:ext cx="2103120" cy="365760"/>
+            <a:ext cx="2103120" cy="375920"/>
           </a:xfrm>
           <a:prstGeom prst="rect">
             <a:avLst/>
@@ -3737,6 +3759,7 @@
               </a:defRPr>
             </a:pPr>
             <a:r>
+              <a:rPr/>
               <a:t>Stage 2</a:t>
             </a:r>
           </a:p>
@@ -3750,8 +3773,8 @@
         </p:nvSpPr>
         <p:spPr>
           <a:xfrm>
-            <a:off x="3840480" y="1828800"/>
-            <a:ext cx="2103120" cy="365760"/>
+            <a:off x="3840480" y="1857248"/>
+            <a:ext cx="2103120" cy="411479"/>
           </a:xfrm>
           <a:prstGeom prst="rect">
             <a:avLst/>
@@ -3772,6 +3795,7 @@
               </a:defRPr>
             </a:pPr>
             <a:r>
+              <a:rPr/>
               <a:t>創発・適応</a:t>
             </a:r>
           </a:p>
@@ -3807,10 +3831,12 @@
               </a:defRPr>
             </a:pPr>
             <a:r>
+              <a:rPr/>
               <a:t>パターンが</a:t>
             </a:r>
             <a:br/>
             <a:r>
+              <a:rPr/>
               <a:t>動的に変化</a:t>
             </a:r>
           </a:p>
@@ -3855,7 +3881,9 @@
           <a:bodyPr rtlCol="0" anchor="ctr"/>
           <a:lstStyle/>
           <a:p>
-            <a:pPr algn="ctr"/>
+            <a:pPr algn="ctr">
+              <a:defRPr/>
+            </a:pPr>
           </a:p>
         </p:txBody>
       </p:sp>
@@ -3898,7 +3926,9 @@
           <a:bodyPr rtlCol="0" anchor="ctr"/>
           <a:lstStyle/>
           <a:p>
-            <a:pPr algn="ctr"/>
+            <a:pPr algn="ctr">
+              <a:defRPr/>
+            </a:pPr>
           </a:p>
         </p:txBody>
       </p:sp>
@@ -3911,7 +3941,7 @@
         <p:spPr>
           <a:xfrm>
             <a:off x="6675120" y="1463040"/>
-            <a:ext cx="2103120" cy="365760"/>
+            <a:ext cx="2103120" cy="375920"/>
           </a:xfrm>
           <a:prstGeom prst="rect">
             <a:avLst/>
@@ -3932,6 +3962,7 @@
               </a:defRPr>
             </a:pPr>
             <a:r>
+              <a:rPr/>
               <a:t>Stage 3</a:t>
             </a:r>
           </a:p>
@@ -3945,8 +3976,8 @@
         </p:nvSpPr>
         <p:spPr>
           <a:xfrm>
-            <a:off x="6675120" y="1828800"/>
-            <a:ext cx="2103120" cy="365760"/>
+            <a:off x="6675120" y="1857248"/>
+            <a:ext cx="2103120" cy="411479"/>
           </a:xfrm>
           <a:prstGeom prst="rect">
             <a:avLst/>
@@ -3967,6 +3998,7 @@
               </a:defRPr>
             </a:pPr>
             <a:r>
+              <a:rPr/>
               <a:t>カオス</a:t>
             </a:r>
           </a:p>
@@ -4002,10 +4034,12 @@
               </a:defRPr>
             </a:pPr>
             <a:r>
+              <a:rPr/>
               <a:t>予測不能</a:t>
             </a:r>
             <a:br/>
             <a:r>
+              <a:rPr/>
               <a:t>非線形</a:t>
             </a:r>
           </a:p>
@@ -4050,7 +4084,9 @@
           <a:bodyPr rtlCol="0" anchor="ctr"/>
           <a:lstStyle/>
           <a:p>
-            <a:pPr algn="ctr"/>
+            <a:pPr algn="ctr">
+              <a:defRPr/>
+            </a:pPr>
           </a:p>
         </p:txBody>
       </p:sp>
@@ -4093,7 +4129,9 @@
           <a:bodyPr rtlCol="0" anchor="ctr"/>
           <a:lstStyle/>
           <a:p>
-            <a:pPr algn="ctr"/>
+            <a:pPr algn="ctr">
+              <a:defRPr/>
+            </a:pPr>
           </a:p>
         </p:txBody>
       </p:sp>
@@ -4106,7 +4144,7 @@
         <p:spPr>
           <a:xfrm>
             <a:off x="9509760" y="1463040"/>
-            <a:ext cx="2103120" cy="365760"/>
+            <a:ext cx="2103120" cy="375920"/>
           </a:xfrm>
           <a:prstGeom prst="rect">
             <a:avLst/>
@@ -4127,6 +4165,7 @@
               </a:defRPr>
             </a:pPr>
             <a:r>
+              <a:rPr/>
               <a:t>Stage 4</a:t>
             </a:r>
           </a:p>
@@ -4140,8 +4179,8 @@
         </p:nvSpPr>
         <p:spPr>
           <a:xfrm>
-            <a:off x="9509760" y="1828800"/>
-            <a:ext cx="2103120" cy="365760"/>
+            <a:off x="9509760" y="1857248"/>
+            <a:ext cx="2103120" cy="411479"/>
           </a:xfrm>
           <a:prstGeom prst="rect">
             <a:avLst/>
@@ -4162,6 +4201,7 @@
               </a:defRPr>
             </a:pPr>
             <a:r>
+              <a:rPr/>
               <a:t>不連続的変容</a:t>
             </a:r>
           </a:p>
@@ -4197,10 +4237,12 @@
               </a:defRPr>
             </a:pPr>
             <a:r>
+              <a:rPr/>
               <a:t>根本的な</a:t>
             </a:r>
             <a:br/>
             <a:r>
+              <a:rPr/>
               <a:t>パラダイム転換</a:t>
             </a:r>
           </a:p>
@@ -4215,7 +4257,7 @@
         <p:spPr>
           <a:xfrm>
             <a:off x="3108960" y="1737360"/>
-            <a:ext cx="457200" cy="457200"/>
+            <a:ext cx="457200" cy="518159"/>
           </a:xfrm>
           <a:prstGeom prst="rect">
             <a:avLst/>
@@ -4236,6 +4278,7 @@
               </a:defRPr>
             </a:pPr>
             <a:r>
+              <a:rPr/>
               <a:t>→</a:t>
             </a:r>
           </a:p>
@@ -4250,7 +4293,7 @@
         <p:spPr>
           <a:xfrm>
             <a:off x="5943600" y="1737360"/>
-            <a:ext cx="457200" cy="457200"/>
+            <a:ext cx="457200" cy="518159"/>
           </a:xfrm>
           <a:prstGeom prst="rect">
             <a:avLst/>
@@ -4271,6 +4314,7 @@
               </a:defRPr>
             </a:pPr>
             <a:r>
+              <a:rPr/>
               <a:t>→</a:t>
             </a:r>
           </a:p>
@@ -4285,7 +4329,7 @@
         <p:spPr>
           <a:xfrm>
             <a:off x="8778240" y="1737360"/>
-            <a:ext cx="457200" cy="457200"/>
+            <a:ext cx="457200" cy="518159"/>
           </a:xfrm>
           <a:prstGeom prst="rect">
             <a:avLst/>
@@ -4306,6 +4350,7 @@
               </a:defRPr>
             </a:pPr>
             <a:r>
+              <a:rPr/>
               <a:t>→</a:t>
             </a:r>
           </a:p>
@@ -4350,7 +4395,9 @@
           <a:bodyPr rtlCol="0" anchor="ctr"/>
           <a:lstStyle/>
           <a:p>
-            <a:pPr algn="ctr"/>
+            <a:pPr algn="ctr">
+              <a:defRPr/>
+            </a:pPr>
           </a:p>
         </p:txBody>
       </p:sp>
@@ -4363,7 +4410,7 @@
         <p:spPr>
           <a:xfrm>
             <a:off x="1005840" y="3566160"/>
-            <a:ext cx="4572000" cy="365760"/>
+            <a:ext cx="4572000" cy="411479"/>
           </a:xfrm>
           <a:prstGeom prst="rect">
             <a:avLst/>
@@ -4384,6 +4431,7 @@
               </a:defRPr>
             </a:pPr>
             <a:r>
+              <a:rPr/>
               <a:t>Stage 1（安定）→ AIが得意</a:t>
             </a:r>
           </a:p>
@@ -4419,14 +4467,17 @@
               </a:defRPr>
             </a:pPr>
             <a:r>
+              <a:rPr/>
               <a:t>単一疾患の問診</a:t>
             </a:r>
             <a:br/>
             <a:r>
+              <a:rPr/>
               <a:t>ルールベースで再現可能</a:t>
             </a:r>
             <a:br/>
             <a:r>
+              <a:rPr/>
               <a:t>→ 機能的忠実度 高い</a:t>
             </a:r>
           </a:p>
@@ -4471,7 +4522,9 @@
           <a:bodyPr rtlCol="0" anchor="ctr"/>
           <a:lstStyle/>
           <a:p>
-            <a:pPr algn="ctr"/>
+            <a:pPr algn="ctr">
+              <a:defRPr/>
+            </a:pPr>
           </a:p>
         </p:txBody>
       </p:sp>
@@ -4484,7 +4537,7 @@
         <p:spPr>
           <a:xfrm>
             <a:off x="6492240" y="3566160"/>
-            <a:ext cx="4572000" cy="365760"/>
+            <a:ext cx="4572000" cy="411479"/>
           </a:xfrm>
           <a:prstGeom prst="rect">
             <a:avLst/>
@@ -4505,6 +4558,7 @@
               </a:defRPr>
             </a:pPr>
             <a:r>
+              <a:rPr/>
               <a:t>Stage 2以降（創発）→ AIが苦手</a:t>
             </a:r>
           </a:p>
@@ -4540,14 +4594,17 @@
               </a:defRPr>
             </a:pPr>
             <a:r>
+              <a:rPr/>
               <a:t>多疾患 + 心理社会的文脈</a:t>
             </a:r>
             <a:br/>
             <a:r>
+              <a:rPr/>
               <a:t>創発的対話・関係性が必要</a:t>
             </a:r>
             <a:br/>
             <a:r>
+              <a:rPr/>
               <a:t>→ 会話的忠実度 低い</a:t>
             </a:r>
           </a:p>
@@ -4592,7 +4649,9 @@
           <a:bodyPr rtlCol="0" anchor="ctr"/>
           <a:lstStyle/>
           <a:p>
-            <a:pPr algn="ctr"/>
+            <a:pPr algn="ctr">
+              <a:defRPr/>
+            </a:pPr>
           </a:p>
         </p:txBody>
       </p:sp>
@@ -4626,6 +4685,7 @@
               </a:defRPr>
             </a:pPr>
             <a:r>
+              <a:rPr/>
               <a:t>家庭医の日常は Stage 2 以降 → 最も必要なシミュレーションがAIの最も苦手な領域</a:t>
             </a:r>
           </a:p>
@@ -4687,6 +4747,7 @@
               </a:defRPr>
             </a:pPr>
             <a:r>
+              <a:rPr/>
               <a:t>Learning Design Lab  |  2026-03-25  |  AIは診断を助けるか？</a:t>
             </a:r>
           </a:p>
@@ -4701,7 +4762,7 @@
         <p:spPr>
           <a:xfrm>
             <a:off x="731520" y="365760"/>
-            <a:ext cx="10972800" cy="548640"/>
+            <a:ext cx="10972800" cy="589279"/>
           </a:xfrm>
           <a:prstGeom prst="rect">
             <a:avLst/>
@@ -4722,6 +4783,7 @@
               </a:defRPr>
             </a:pPr>
             <a:r>
+              <a:rPr/>
               <a:t>臨床への実装 — 使い分けマトリクス</a:t>
             </a:r>
           </a:p>
@@ -5290,7 +5352,9 @@
           <a:bodyPr rtlCol="0" anchor="ctr"/>
           <a:lstStyle/>
           <a:p>
-            <a:pPr algn="ctr"/>
+            <a:pPr algn="ctr">
+              <a:defRPr/>
+            </a:pPr>
           </a:p>
         </p:txBody>
       </p:sp>
@@ -5324,6 +5388,7 @@
               </a:defRPr>
             </a:pPr>
             <a:r>
+              <a:rPr/>
               <a:t>Stage 1の課題にはAIを積極的に使う  |  Stage 2以降の課題には人間の指導が不可欠</a:t>
             </a:r>
           </a:p>
@@ -5385,6 +5450,7 @@
               </a:defRPr>
             </a:pPr>
             <a:r>
+              <a:rPr/>
               <a:t>Learning Design Lab  |  2026-03-25  |  AIは診断を助けるか？</a:t>
             </a:r>
           </a:p>
@@ -5399,7 +5465,7 @@
         <p:spPr>
           <a:xfrm>
             <a:off x="731520" y="365760"/>
-            <a:ext cx="10058400" cy="548640"/>
+            <a:ext cx="10058400" cy="660400"/>
           </a:xfrm>
           <a:prstGeom prst="rect">
             <a:avLst/>
@@ -5420,6 +5486,7 @@
               </a:defRPr>
             </a:pPr>
             <a:r>
+              <a:rPr/>
               <a:t>ディスカッション（5分）</a:t>
             </a:r>
           </a:p>
@@ -5433,8 +5500,8 @@
         </p:nvSpPr>
         <p:spPr>
           <a:xfrm>
-            <a:off x="731520" y="1005840"/>
-            <a:ext cx="10058400" cy="365760"/>
+            <a:off x="731520" y="1044448"/>
+            <a:ext cx="10058400" cy="375920"/>
           </a:xfrm>
           <a:prstGeom prst="rect">
             <a:avLst/>
@@ -5455,6 +5522,7 @@
               </a:defRPr>
             </a:pPr>
             <a:r>
+              <a:rPr/>
               <a:t>3人グループで3分 → 全体共有2分</a:t>
             </a:r>
           </a:p>
@@ -5499,7 +5567,9 @@
           <a:bodyPr rtlCol="0" anchor="ctr"/>
           <a:lstStyle/>
           <a:p>
-            <a:pPr algn="ctr"/>
+            <a:pPr algn="ctr">
+              <a:defRPr/>
+            </a:pPr>
           </a:p>
         </p:txBody>
       </p:sp>
@@ -5542,7 +5612,9 @@
           <a:bodyPr rtlCol="0" anchor="ctr"/>
           <a:lstStyle/>
           <a:p>
-            <a:pPr algn="ctr"/>
+            <a:pPr algn="ctr">
+              <a:defRPr/>
+            </a:pPr>
           </a:p>
         </p:txBody>
       </p:sp>
@@ -5555,7 +5627,7 @@
         <p:spPr>
           <a:xfrm>
             <a:off x="1097280" y="1920240"/>
-            <a:ext cx="1828800" cy="365760"/>
+            <a:ext cx="1828800" cy="411479"/>
           </a:xfrm>
           <a:prstGeom prst="rect">
             <a:avLst/>
@@ -5576,6 +5648,7 @@
               </a:defRPr>
             </a:pPr>
             <a:r>
+              <a:rPr/>
               <a:t>問い 1</a:t>
             </a:r>
           </a:p>
@@ -5589,7 +5662,7 @@
         </p:nvSpPr>
         <p:spPr>
           <a:xfrm>
-            <a:off x="1097280" y="2286000"/>
+            <a:off x="1097280" y="2350007"/>
             <a:ext cx="9601200" cy="731520"/>
           </a:xfrm>
           <a:prstGeom prst="rect">
@@ -5611,10 +5684,12 @@
               </a:defRPr>
             </a:pPr>
             <a:r>
+              <a:rPr/>
               <a:t>「患者役AI」と「ソクラテス的ガイドAI」</a:t>
             </a:r>
             <a:br/>
             <a:r>
+              <a:rPr/>
               <a:t>のどちらが学びになりましたか？ なぜ？</a:t>
             </a:r>
           </a:p>
@@ -5659,7 +5734,9 @@
           <a:bodyPr rtlCol="0" anchor="ctr"/>
           <a:lstStyle/>
           <a:p>
-            <a:pPr algn="ctr"/>
+            <a:pPr algn="ctr">
+              <a:defRPr/>
+            </a:pPr>
           </a:p>
         </p:txBody>
       </p:sp>
@@ -5702,7 +5779,9 @@
           <a:bodyPr rtlCol="0" anchor="ctr"/>
           <a:lstStyle/>
           <a:p>
-            <a:pPr algn="ctr"/>
+            <a:pPr algn="ctr">
+              <a:defRPr/>
+            </a:pPr>
           </a:p>
         </p:txBody>
       </p:sp>
@@ -5715,7 +5794,7 @@
         <p:spPr>
           <a:xfrm>
             <a:off x="1097280" y="3474720"/>
-            <a:ext cx="1828800" cy="365760"/>
+            <a:ext cx="1828800" cy="411479"/>
           </a:xfrm>
           <a:prstGeom prst="rect">
             <a:avLst/>
@@ -5736,6 +5815,7 @@
               </a:defRPr>
             </a:pPr>
             <a:r>
+              <a:rPr/>
               <a:t>問い 2</a:t>
             </a:r>
           </a:p>
@@ -5749,7 +5829,7 @@
         </p:nvSpPr>
         <p:spPr>
           <a:xfrm>
-            <a:off x="1097280" y="3840480"/>
+            <a:off x="1097280" y="3904486"/>
             <a:ext cx="9601200" cy="731520"/>
           </a:xfrm>
           <a:prstGeom prst="rect">
@@ -5771,10 +5851,12 @@
               </a:defRPr>
             </a:pPr>
             <a:r>
+              <a:rPr/>
               <a:t>あなたの研修の中で、AIを「レッドチーム</a:t>
             </a:r>
             <a:br/>
             <a:r>
+              <a:rPr/>
               <a:t>パートナー」として使えそうな場面はどこですか？</a:t>
             </a:r>
           </a:p>
@@ -5819,7 +5901,9 @@
           <a:bodyPr rtlCol="0" anchor="ctr"/>
           <a:lstStyle/>
           <a:p>
-            <a:pPr algn="ctr"/>
+            <a:pPr algn="ctr">
+              <a:defRPr/>
+            </a:pPr>
           </a:p>
         </p:txBody>
       </p:sp>
@@ -5862,7 +5946,9 @@
           <a:bodyPr rtlCol="0" anchor="ctr"/>
           <a:lstStyle/>
           <a:p>
-            <a:pPr algn="ctr"/>
+            <a:pPr algn="ctr">
+              <a:defRPr/>
+            </a:pPr>
           </a:p>
         </p:txBody>
       </p:sp>
@@ -5875,7 +5961,7 @@
         <p:spPr>
           <a:xfrm>
             <a:off x="1097280" y="5029200"/>
-            <a:ext cx="1828800" cy="365760"/>
+            <a:ext cx="1828800" cy="411479"/>
           </a:xfrm>
           <a:prstGeom prst="rect">
             <a:avLst/>
@@ -5896,6 +5982,7 @@
               </a:defRPr>
             </a:pPr>
             <a:r>
+              <a:rPr/>
               <a:t>問い 3</a:t>
             </a:r>
           </a:p>
@@ -5909,7 +5996,7 @@
         </p:nvSpPr>
         <p:spPr>
           <a:xfrm>
-            <a:off x="1097280" y="5394960"/>
+            <a:off x="1097280" y="5458967"/>
             <a:ext cx="9601200" cy="731520"/>
           </a:xfrm>
           <a:prstGeom prst="rect">
@@ -5931,10 +6018,12 @@
               </a:defRPr>
             </a:pPr>
             <a:r>
+              <a:rPr/>
               <a:t>「機能的忠実度は高いが会話的忠実度は低い」</a:t>
             </a:r>
             <a:br/>
             <a:r>
+              <a:rPr/>
               <a:t>——患者さんへのAI活用でも同じことが言えそうですか？</a:t>
             </a:r>
           </a:p>
@@ -5975,7 +6064,7 @@
         <p:spPr>
           <a:xfrm>
             <a:off x="731520" y="365760"/>
-            <a:ext cx="10058400" cy="548640"/>
+            <a:ext cx="10058400" cy="660400"/>
           </a:xfrm>
           <a:prstGeom prst="rect">
             <a:avLst/>
@@ -5996,6 +6085,7 @@
               </a:defRPr>
             </a:pPr>
             <a:r>
+              <a:rPr/>
               <a:t>持ち帰り</a:t>
             </a:r>
           </a:p>
@@ -6040,7 +6130,9 @@
           <a:bodyPr rtlCol="0" anchor="ctr"/>
           <a:lstStyle/>
           <a:p>
-            <a:pPr algn="ctr"/>
+            <a:pPr algn="ctr">
+              <a:defRPr/>
+            </a:pPr>
           </a:p>
         </p:txBody>
       </p:sp>
@@ -6074,6 +6166,7 @@
               </a:defRPr>
             </a:pPr>
             <a:r>
+              <a:rPr/>
               <a:t>1</a:t>
             </a:r>
           </a:p>
@@ -6109,6 +6202,7 @@
               </a:defRPr>
             </a:pPr>
             <a:r>
+              <a:rPr/>
               <a:t>AIは答えを出す道具ではなく、問いを立てる鏡</a:t>
             </a:r>
           </a:p>
@@ -6144,6 +6238,7 @@
               </a:defRPr>
             </a:pPr>
             <a:r>
+              <a:rPr/>
               <a:t>受動的に使うとバイアスを増強する。能動的に使うと思考を拡張する。</a:t>
             </a:r>
           </a:p>
@@ -6188,7 +6283,9 @@
           <a:bodyPr rtlCol="0" anchor="ctr"/>
           <a:lstStyle/>
           <a:p>
-            <a:pPr algn="ctr"/>
+            <a:pPr algn="ctr">
+              <a:defRPr/>
+            </a:pPr>
           </a:p>
         </p:txBody>
       </p:sp>
@@ -6222,6 +6319,7 @@
               </a:defRPr>
             </a:pPr>
             <a:r>
+              <a:rPr/>
               <a:t>2</a:t>
             </a:r>
           </a:p>
@@ -6257,6 +6355,7 @@
               </a:defRPr>
             </a:pPr>
             <a:r>
+              <a:rPr/>
               <a:t>「機能」と「会話」は別物</a:t>
             </a:r>
           </a:p>
@@ -6292,6 +6391,7 @@
               </a:defRPr>
             </a:pPr>
             <a:r>
+              <a:rPr/>
               <a:t>AIは臨床的に正確だが人間的ではない。Stage 1/2 の構造的違いで説明できる。</a:t>
             </a:r>
           </a:p>
@@ -6336,7 +6436,9 @@
           <a:bodyPr rtlCol="0" anchor="ctr"/>
           <a:lstStyle/>
           <a:p>
-            <a:pPr algn="ctr"/>
+            <a:pPr algn="ctr">
+              <a:defRPr/>
+            </a:pPr>
           </a:p>
         </p:txBody>
       </p:sp>
@@ -6370,6 +6472,7 @@
               </a:defRPr>
             </a:pPr>
             <a:r>
+              <a:rPr/>
               <a:t>3</a:t>
             </a:r>
           </a:p>
@@ -6405,6 +6508,7 @@
               </a:defRPr>
             </a:pPr>
             <a:r>
+              <a:rPr/>
               <a:t>家庭医が扱う複雑さは、現在のAIの限界の先にある</a:t>
             </a:r>
           </a:p>
@@ -6440,6 +6544,7 @@
               </a:defRPr>
             </a:pPr>
             <a:r>
+              <a:rPr/>
               <a:t>だからこそ、限界を知った上で使いこなす力がこれからの医師に必要。</a:t>
             </a:r>
           </a:p>
@@ -6484,7 +6589,9 @@
           <a:bodyPr rtlCol="0" anchor="ctr"/>
           <a:lstStyle/>
           <a:p>
-            <a:pPr algn="ctr"/>
+            <a:pPr algn="ctr">
+              <a:defRPr/>
+            </a:pPr>
           </a:p>
         </p:txBody>
       </p:sp>
@@ -6527,7 +6634,9 @@
           <a:bodyPr rtlCol="0" anchor="ctr"/>
           <a:lstStyle/>
           <a:p>
-            <a:pPr algn="ctr"/>
+            <a:pPr algn="ctr">
+              <a:defRPr/>
+            </a:pPr>
           </a:p>
         </p:txBody>
       </p:sp>
@@ -6561,6 +6670,7 @@
               </a:defRPr>
             </a:pPr>
             <a:r>
+              <a:rPr/>
               <a:t>明日の外来でAIに1回聞いてみてください</a:t>
             </a:r>
           </a:p>
@@ -6596,10 +6706,12 @@
               </a:defRPr>
             </a:pPr>
             <a:r>
+              <a:rPr/>
               <a:t>「この患者の鑑別で私が見落としている可能性は？」とAIに聞いてみる。</a:t>
             </a:r>
             <a:br/>
             <a:r>
+              <a:rPr/>
               <a:t>来週、その体験をシェアしましょう。</a:t>
             </a:r>
           </a:p>
@@ -6635,6 +6747,7 @@
               </a:defRPr>
             </a:pPr>
             <a:r>
+              <a:rPr/>
               <a:t>Learning Design Lab  |  2026-03-25</a:t>
             </a:r>
           </a:p>
@@ -6696,6 +6809,7 @@
               </a:defRPr>
             </a:pPr>
             <a:r>
+              <a:rPr/>
               <a:t>Learning Design Lab  |  2026-03-25  |  AIは診断を助けるか？</a:t>
             </a:r>
           </a:p>
@@ -6731,6 +6845,7 @@
               </a:defRPr>
             </a:pPr>
             <a:r>
+              <a:rPr/>
               <a:t>AIを使ったら、診断の正解率が下がった。</a:t>
             </a:r>
           </a:p>
@@ -6775,7 +6890,9 @@
           <a:bodyPr rtlCol="0" anchor="ctr"/>
           <a:lstStyle/>
           <a:p>
-            <a:pPr algn="ctr"/>
+            <a:pPr algn="ctr">
+              <a:defRPr/>
+            </a:pPr>
           </a:p>
         </p:txBody>
       </p:sp>
@@ -6788,7 +6905,7 @@
         <p:spPr>
           <a:xfrm>
             <a:off x="1097280" y="1828800"/>
-            <a:ext cx="2560320" cy="914400"/>
+            <a:ext cx="2560320" cy="1087120"/>
           </a:xfrm>
           <a:prstGeom prst="rect">
             <a:avLst/>
@@ -6809,6 +6926,7 @@
               </a:defRPr>
             </a:pPr>
             <a:r>
+              <a:rPr/>
               <a:t>90%</a:t>
             </a:r>
           </a:p>
@@ -6844,6 +6962,7 @@
               </a:defRPr>
             </a:pPr>
             <a:r>
+              <a:rPr/>
               <a:t>GPT-4 単独</a:t>
             </a:r>
           </a:p>
@@ -6888,7 +7007,9 @@
           <a:bodyPr rtlCol="0" anchor="ctr"/>
           <a:lstStyle/>
           <a:p>
-            <a:pPr algn="ctr"/>
+            <a:pPr algn="ctr">
+              <a:defRPr/>
+            </a:pPr>
           </a:p>
         </p:txBody>
       </p:sp>
@@ -6901,7 +7022,7 @@
         <p:spPr>
           <a:xfrm>
             <a:off x="4572000" y="1828800"/>
-            <a:ext cx="2560320" cy="914400"/>
+            <a:ext cx="2560320" cy="1087120"/>
           </a:xfrm>
           <a:prstGeom prst="rect">
             <a:avLst/>
@@ -6922,6 +7043,7 @@
               </a:defRPr>
             </a:pPr>
             <a:r>
+              <a:rPr/>
               <a:t>76%</a:t>
             </a:r>
           </a:p>
@@ -6957,6 +7079,7 @@
               </a:defRPr>
             </a:pPr>
             <a:r>
+              <a:rPr/>
               <a:t>医師 + GPT-4 補助</a:t>
             </a:r>
           </a:p>
@@ -7001,7 +7124,9 @@
           <a:bodyPr rtlCol="0" anchor="ctr"/>
           <a:lstStyle/>
           <a:p>
-            <a:pPr algn="ctr"/>
+            <a:pPr algn="ctr">
+              <a:defRPr/>
+            </a:pPr>
           </a:p>
         </p:txBody>
       </p:sp>
@@ -7014,7 +7139,7 @@
         <p:spPr>
           <a:xfrm>
             <a:off x="8046720" y="1828800"/>
-            <a:ext cx="2560320" cy="914400"/>
+            <a:ext cx="2560320" cy="1087120"/>
           </a:xfrm>
           <a:prstGeom prst="rect">
             <a:avLst/>
@@ -7035,6 +7160,7 @@
               </a:defRPr>
             </a:pPr>
             <a:r>
+              <a:rPr/>
               <a:t>74%</a:t>
             </a:r>
           </a:p>
@@ -7070,6 +7196,7 @@
               </a:defRPr>
             </a:pPr>
             <a:r>
+              <a:rPr/>
               <a:t>医師 単独</a:t>
             </a:r>
           </a:p>
@@ -7105,6 +7232,7 @@
               </a:defRPr>
             </a:pPr>
             <a:r>
+              <a:rPr/>
               <a:t>— Frontiers in Digital Health, 2025</a:t>
             </a:r>
           </a:p>
@@ -7149,7 +7277,9 @@
           <a:bodyPr rtlCol="0" anchor="ctr"/>
           <a:lstStyle/>
           <a:p>
-            <a:pPr algn="ctr"/>
+            <a:pPr algn="ctr">
+              <a:defRPr/>
+            </a:pPr>
           </a:p>
         </p:txBody>
       </p:sp>
@@ -7183,10 +7313,12 @@
               </a:defRPr>
             </a:pPr>
             <a:r>
+              <a:rPr/>
               <a:t>なぜ、AIを「使える」のに、</a:t>
             </a:r>
             <a:br/>
             <a:r>
+              <a:rPr/>
               <a:t>医師の精度はわずか2%しか改善しなかったのか？</a:t>
             </a:r>
           </a:p>
@@ -7248,6 +7380,7 @@
               </a:defRPr>
             </a:pPr>
             <a:r>
+              <a:rPr/>
               <a:t>Learning Design Lab  |  2026-03-25  |  AIは診断を助けるか？</a:t>
             </a:r>
           </a:p>
@@ -7262,7 +7395,7 @@
         <p:spPr>
           <a:xfrm>
             <a:off x="731520" y="365760"/>
-            <a:ext cx="10058400" cy="548640"/>
+            <a:ext cx="10058400" cy="660400"/>
           </a:xfrm>
           <a:prstGeom prst="rect">
             <a:avLst/>
@@ -7283,6 +7416,7 @@
               </a:defRPr>
             </a:pPr>
             <a:r>
+              <a:rPr/>
               <a:t>今日の学習目標</a:t>
             </a:r>
           </a:p>
@@ -7296,8 +7430,8 @@
         </p:nvSpPr>
         <p:spPr>
           <a:xfrm>
-            <a:off x="731520" y="1005840"/>
-            <a:ext cx="10058400" cy="365760"/>
+            <a:off x="731520" y="1044448"/>
+            <a:ext cx="10058400" cy="375920"/>
           </a:xfrm>
           <a:prstGeom prst="rect">
             <a:avLst/>
@@ -7318,6 +7452,7 @@
               </a:defRPr>
             </a:pPr>
             <a:r>
+              <a:rPr/>
               <a:t>この30分の後、あなたは：</a:t>
             </a:r>
           </a:p>
@@ -7362,7 +7497,9 @@
           <a:bodyPr rtlCol="0" anchor="ctr"/>
           <a:lstStyle/>
           <a:p>
-            <a:pPr algn="ctr"/>
+            <a:pPr algn="ctr">
+              <a:defRPr/>
+            </a:pPr>
           </a:p>
         </p:txBody>
       </p:sp>
@@ -7396,6 +7533,7 @@
               </a:defRPr>
             </a:pPr>
             <a:r>
+              <a:rPr/>
               <a:t>1</a:t>
             </a:r>
           </a:p>
@@ -7431,6 +7569,7 @@
               </a:defRPr>
             </a:pPr>
             <a:r>
+              <a:rPr/>
               <a:t>説明できる</a:t>
             </a:r>
           </a:p>
@@ -7466,10 +7605,12 @@
               </a:defRPr>
             </a:pPr>
             <a:r>
+              <a:rPr/>
               <a:t>臨床推論における3大認知バイアス</a:t>
             </a:r>
             <a:br/>
             <a:r>
+              <a:rPr/>
               <a:t>（アンカリング・プレマチュアクロージャー・利用可能性H）</a:t>
             </a:r>
           </a:p>
@@ -7514,7 +7655,9 @@
           <a:bodyPr rtlCol="0" anchor="ctr"/>
           <a:lstStyle/>
           <a:p>
-            <a:pPr algn="ctr"/>
+            <a:pPr algn="ctr">
+              <a:defRPr/>
+            </a:pPr>
           </a:p>
         </p:txBody>
       </p:sp>
@@ -7548,6 +7691,7 @@
               </a:defRPr>
             </a:pPr>
             <a:r>
+              <a:rPr/>
               <a:t>2</a:t>
             </a:r>
           </a:p>
@@ -7583,6 +7727,7 @@
               </a:defRPr>
             </a:pPr>
             <a:r>
+              <a:rPr/>
               <a:t>批判的に吟味できる</a:t>
             </a:r>
           </a:p>
@@ -7618,10 +7763,12 @@
               </a:defRPr>
             </a:pPr>
             <a:r>
+              <a:rPr/>
               <a:t>AI仮想患者の「機能的忠実度」と</a:t>
             </a:r>
             <a:br/>
             <a:r>
+              <a:rPr/>
               <a:t>「会話的忠実度」の違い</a:t>
             </a:r>
           </a:p>
@@ -7666,7 +7813,9 @@
           <a:bodyPr rtlCol="0" anchor="ctr"/>
           <a:lstStyle/>
           <a:p>
-            <a:pPr algn="ctr"/>
+            <a:pPr algn="ctr">
+              <a:defRPr/>
+            </a:pPr>
           </a:p>
         </p:txBody>
       </p:sp>
@@ -7700,6 +7849,7 @@
               </a:defRPr>
             </a:pPr>
             <a:r>
+              <a:rPr/>
               <a:t>3</a:t>
             </a:r>
           </a:p>
@@ -7735,6 +7885,7 @@
               </a:defRPr>
             </a:pPr>
             <a:r>
+              <a:rPr/>
               <a:t>判断できる</a:t>
             </a:r>
           </a:p>
@@ -7770,10 +7921,12 @@
               </a:defRPr>
             </a:pPr>
             <a:r>
+              <a:rPr/>
               <a:t>AIを使うべき場面と、</a:t>
             </a:r>
             <a:br/>
             <a:r>
+              <a:rPr/>
               <a:t>使うと逆効果になる場面</a:t>
             </a:r>
           </a:p>
@@ -7818,7 +7971,9 @@
           <a:bodyPr rtlCol="0" anchor="ctr"/>
           <a:lstStyle/>
           <a:p>
-            <a:pPr algn="ctr"/>
+            <a:pPr algn="ctr">
+              <a:defRPr/>
+            </a:pPr>
           </a:p>
         </p:txBody>
       </p:sp>
@@ -7852,6 +8007,7 @@
               </a:defRPr>
             </a:pPr>
             <a:r>
+              <a:rPr/>
               <a:t>4</a:t>
             </a:r>
           </a:p>
@@ -7887,6 +8043,7 @@
               </a:defRPr>
             </a:pPr>
             <a:r>
+              <a:rPr/>
               <a:t>提案できる</a:t>
             </a:r>
           </a:p>
@@ -7922,10 +8079,12 @@
               </a:defRPr>
             </a:pPr>
             <a:r>
+              <a:rPr/>
               <a:t>自分の研修にAIをどう組み込むかの</a:t>
             </a:r>
             <a:br/>
             <a:r>
+              <a:rPr/>
               <a:t>アイデア</a:t>
             </a:r>
           </a:p>
@@ -7987,6 +8146,7 @@
               </a:defRPr>
             </a:pPr>
             <a:r>
+              <a:rPr/>
               <a:t>Learning Design Lab  |  2026-03-25  |  AIは診断を助けるか？</a:t>
             </a:r>
           </a:p>
@@ -8001,7 +8161,7 @@
         <p:spPr>
           <a:xfrm>
             <a:off x="731520" y="365760"/>
-            <a:ext cx="10058400" cy="548640"/>
+            <a:ext cx="10058400" cy="660400"/>
           </a:xfrm>
           <a:prstGeom prst="rect">
             <a:avLst/>
@@ -8022,6 +8182,7 @@
               </a:defRPr>
             </a:pPr>
             <a:r>
+              <a:rPr/>
               <a:t>前提確認 — あなたの認知バイアス体験</a:t>
             </a:r>
           </a:p>
@@ -8036,7 +8197,7 @@
         <p:spPr>
           <a:xfrm>
             <a:off x="731520" y="1097280"/>
-            <a:ext cx="4572000" cy="365760"/>
+            <a:ext cx="4572000" cy="411479"/>
           </a:xfrm>
           <a:prstGeom prst="rect">
             <a:avLst/>
@@ -8057,6 +8218,7 @@
               </a:defRPr>
             </a:pPr>
             <a:r>
+              <a:rPr/>
               <a:t>Quick Poll（挙手）</a:t>
             </a:r>
           </a:p>
@@ -8101,7 +8263,9 @@
           <a:bodyPr rtlCol="0" anchor="ctr"/>
           <a:lstStyle/>
           <a:p>
-            <a:pPr algn="ctr"/>
+            <a:pPr algn="ctr">
+              <a:defRPr/>
+            </a:pPr>
           </a:p>
         </p:txBody>
       </p:sp>
@@ -8144,7 +8308,9 @@
           <a:bodyPr rtlCol="0" anchor="ctr"/>
           <a:lstStyle/>
           <a:p>
-            <a:pPr algn="ctr"/>
+            <a:pPr algn="ctr">
+              <a:defRPr/>
+            </a:pPr>
           </a:p>
         </p:txBody>
       </p:sp>
@@ -8178,6 +8344,7 @@
               </a:defRPr>
             </a:pPr>
             <a:r>
+              <a:rPr/>
               <a:t>✋  AI（ChatGPTなど）を臨床で使ったことがある人？</a:t>
             </a:r>
           </a:p>
@@ -8222,7 +8389,9 @@
           <a:bodyPr rtlCol="0" anchor="ctr"/>
           <a:lstStyle/>
           <a:p>
-            <a:pPr algn="ctr"/>
+            <a:pPr algn="ctr">
+              <a:defRPr/>
+            </a:pPr>
           </a:p>
         </p:txBody>
       </p:sp>
@@ -8265,7 +8434,9 @@
           <a:bodyPr rtlCol="0" anchor="ctr"/>
           <a:lstStyle/>
           <a:p>
-            <a:pPr algn="ctr"/>
+            <a:pPr algn="ctr">
+              <a:defRPr/>
+            </a:pPr>
           </a:p>
         </p:txBody>
       </p:sp>
@@ -8299,6 +8470,7 @@
               </a:defRPr>
             </a:pPr>
             <a:r>
+              <a:rPr/>
               <a:t>✋  使ったとき、AIの答えに引きずられた経験がある人？</a:t>
             </a:r>
           </a:p>
@@ -8343,7 +8515,9 @@
           <a:bodyPr rtlCol="0" anchor="ctr"/>
           <a:lstStyle/>
           <a:p>
-            <a:pPr algn="ctr"/>
+            <a:pPr algn="ctr">
+              <a:defRPr/>
+            </a:pPr>
           </a:p>
         </p:txBody>
       </p:sp>
@@ -8386,7 +8560,9 @@
           <a:bodyPr rtlCol="0" anchor="ctr"/>
           <a:lstStyle/>
           <a:p>
-            <a:pPr algn="ctr"/>
+            <a:pPr algn="ctr">
+              <a:defRPr/>
+            </a:pPr>
           </a:p>
         </p:txBody>
       </p:sp>
@@ -8420,6 +8596,7 @@
               </a:defRPr>
             </a:pPr>
             <a:r>
+              <a:rPr/>
               <a:t>✋  逆に「AIは間違っている」と思って無視した経験がある人？</a:t>
             </a:r>
           </a:p>
@@ -8464,7 +8641,9 @@
           <a:bodyPr rtlCol="0" anchor="ctr"/>
           <a:lstStyle/>
           <a:p>
-            <a:pPr algn="ctr"/>
+            <a:pPr algn="ctr">
+              <a:defRPr/>
+            </a:pPr>
           </a:p>
         </p:txBody>
       </p:sp>
@@ -8498,6 +8677,7 @@
               </a:defRPr>
             </a:pPr>
             <a:r>
+              <a:rPr/>
               <a:t>どちらも「認知バイアス」の一種です</a:t>
             </a:r>
           </a:p>
@@ -8559,6 +8739,7 @@
               </a:defRPr>
             </a:pPr>
             <a:r>
+              <a:rPr/>
               <a:t>Learning Design Lab  |  2026-03-25  |  AIは診断を助けるか？</a:t>
             </a:r>
           </a:p>
@@ -8573,7 +8754,7 @@
         <p:spPr>
           <a:xfrm>
             <a:off x="731520" y="365760"/>
-            <a:ext cx="10058400" cy="548640"/>
+            <a:ext cx="10058400" cy="660400"/>
           </a:xfrm>
           <a:prstGeom prst="rect">
             <a:avLst/>
@@ -8594,6 +8775,7 @@
               </a:defRPr>
             </a:pPr>
             <a:r>
+              <a:rPr/>
               <a:t>臨床推論の3大認知バイアス</a:t>
             </a:r>
           </a:p>
@@ -8638,7 +8820,9 @@
           <a:bodyPr rtlCol="0" anchor="ctr"/>
           <a:lstStyle/>
           <a:p>
-            <a:pPr algn="ctr"/>
+            <a:pPr algn="ctr">
+              <a:defRPr/>
+            </a:pPr>
           </a:p>
         </p:txBody>
       </p:sp>
@@ -8681,7 +8865,9 @@
           <a:bodyPr rtlCol="0" anchor="ctr"/>
           <a:lstStyle/>
           <a:p>
-            <a:pPr algn="ctr"/>
+            <a:pPr algn="ctr">
+              <a:defRPr/>
+            </a:pPr>
           </a:p>
         </p:txBody>
       </p:sp>
@@ -8715,6 +8901,7 @@
               </a:defRPr>
             </a:pPr>
             <a:r>
+              <a:rPr/>
               <a:t>1. アンカリングバイアス</a:t>
             </a:r>
           </a:p>
@@ -8728,7 +8915,7 @@
         </p:nvSpPr>
         <p:spPr>
           <a:xfrm>
-            <a:off x="1097280" y="1691640"/>
+            <a:off x="1097280" y="1755648"/>
             <a:ext cx="5029200" cy="365760"/>
           </a:xfrm>
           <a:prstGeom prst="rect">
@@ -8750,6 +8937,7 @@
               </a:defRPr>
             </a:pPr>
             <a:r>
+              <a:rPr/>
               <a:t>最初に得た情報に固執し、後の情報を過小評価する</a:t>
             </a:r>
           </a:p>
@@ -8785,6 +8973,7 @@
               </a:defRPr>
             </a:pPr>
             <a:r>
+              <a:rPr/>
               <a:t>例: 「胸痛の30歳男性」→ 筋骨格系と決めつけ → 心筋炎を見逃す</a:t>
             </a:r>
           </a:p>
@@ -8829,7 +9018,9 @@
           <a:bodyPr rtlCol="0" anchor="ctr"/>
           <a:lstStyle/>
           <a:p>
-            <a:pPr algn="ctr"/>
+            <a:pPr algn="ctr">
+              <a:defRPr/>
+            </a:pPr>
           </a:p>
         </p:txBody>
       </p:sp>
@@ -8872,7 +9063,9 @@
           <a:bodyPr rtlCol="0" anchor="ctr"/>
           <a:lstStyle/>
           <a:p>
-            <a:pPr algn="ctr"/>
+            <a:pPr algn="ctr">
+              <a:defRPr/>
+            </a:pPr>
           </a:p>
         </p:txBody>
       </p:sp>
@@ -8906,6 +9099,7 @@
               </a:defRPr>
             </a:pPr>
             <a:r>
+              <a:rPr/>
               <a:t>2. プレマチュアクロージャー</a:t>
             </a:r>
           </a:p>
@@ -8919,7 +9113,7 @@
         </p:nvSpPr>
         <p:spPr>
           <a:xfrm>
-            <a:off x="1097280" y="3246120"/>
+            <a:off x="1097280" y="3310128"/>
             <a:ext cx="5029200" cy="365760"/>
           </a:xfrm>
           <a:prstGeom prst="rect">
@@ -8941,6 +9135,7 @@
               </a:defRPr>
             </a:pPr>
             <a:r>
+              <a:rPr/>
               <a:t>十分な情報収集前に診断を確定してしまう</a:t>
             </a:r>
           </a:p>
@@ -8976,6 +9171,7 @@
               </a:defRPr>
             </a:pPr>
             <a:r>
+              <a:rPr/>
               <a:t>例: 発熱+咳 → 「風邪でしょう」→ 肺炎を見逃す</a:t>
             </a:r>
           </a:p>
@@ -9020,7 +9216,9 @@
           <a:bodyPr rtlCol="0" anchor="ctr"/>
           <a:lstStyle/>
           <a:p>
-            <a:pPr algn="ctr"/>
+            <a:pPr algn="ctr">
+              <a:defRPr/>
+            </a:pPr>
           </a:p>
         </p:txBody>
       </p:sp>
@@ -9063,7 +9261,9 @@
           <a:bodyPr rtlCol="0" anchor="ctr"/>
           <a:lstStyle/>
           <a:p>
-            <a:pPr algn="ctr"/>
+            <a:pPr algn="ctr">
+              <a:defRPr/>
+            </a:pPr>
           </a:p>
         </p:txBody>
       </p:sp>
@@ -9097,6 +9297,7 @@
               </a:defRPr>
             </a:pPr>
             <a:r>
+              <a:rPr/>
               <a:t>3. 利用可能性ヒューリスティクス</a:t>
             </a:r>
           </a:p>
@@ -9110,7 +9311,7 @@
         </p:nvSpPr>
         <p:spPr>
           <a:xfrm>
-            <a:off x="1097280" y="4800600"/>
+            <a:off x="1097280" y="4864607"/>
             <a:ext cx="5029200" cy="365760"/>
           </a:xfrm>
           <a:prstGeom prst="rect">
@@ -9132,6 +9333,7 @@
               </a:defRPr>
             </a:pPr>
             <a:r>
+              <a:rPr/>
               <a:t>最近経験した症例に引きずられる</a:t>
             </a:r>
           </a:p>
@@ -9167,6 +9369,7 @@
               </a:defRPr>
             </a:pPr>
             <a:r>
+              <a:rPr/>
               <a:t>例: 先週コロナ10人 → 今日の発熱もコロナだろう</a:t>
             </a:r>
           </a:p>
@@ -9202,6 +9405,7 @@
               </a:defRPr>
             </a:pPr>
             <a:r>
+              <a:rPr/>
               <a:t>共通点: ワーキングメモリの制約（同時に4-5項目しか処理できない）が根本原因</a:t>
             </a:r>
           </a:p>
@@ -9263,6 +9467,7 @@
               </a:defRPr>
             </a:pPr>
             <a:r>
+              <a:rPr/>
               <a:t>Learning Design Lab  |  2026-03-25  |  AIは診断を助けるか？</a:t>
             </a:r>
           </a:p>
@@ -9277,7 +9482,7 @@
         <p:spPr>
           <a:xfrm>
             <a:off x="731520" y="365760"/>
-            <a:ext cx="10058400" cy="548640"/>
+            <a:ext cx="10058400" cy="660400"/>
           </a:xfrm>
           <a:prstGeom prst="rect">
             <a:avLst/>
@@ -9298,6 +9503,7 @@
               </a:defRPr>
             </a:pPr>
             <a:r>
+              <a:rPr/>
               <a:t>AIはこれを「解決」できるか？</a:t>
             </a:r>
           </a:p>
@@ -9608,7 +9814,9 @@
           <a:bodyPr rtlCol="0" anchor="ctr"/>
           <a:lstStyle/>
           <a:p>
-            <a:pPr algn="ctr"/>
+            <a:pPr algn="ctr">
+              <a:defRPr/>
+            </a:pPr>
           </a:p>
         </p:txBody>
       </p:sp>
@@ -9621,7 +9829,7 @@
         <p:spPr>
           <a:xfrm>
             <a:off x="1097280" y="4480560"/>
-            <a:ext cx="9144000" cy="457200"/>
+            <a:ext cx="9144000" cy="482600"/>
           </a:xfrm>
           <a:prstGeom prst="rect">
             <a:avLst/>
@@ -9642,6 +9850,7 @@
               </a:defRPr>
             </a:pPr>
             <a:r>
+              <a:rPr/>
               <a:t>しかし現実は...</a:t>
             </a:r>
           </a:p>
@@ -9656,7 +9865,7 @@
         <p:spPr>
           <a:xfrm>
             <a:off x="1097280" y="5029200"/>
-            <a:ext cx="9144000" cy="365760"/>
+            <a:ext cx="9144000" cy="375920"/>
           </a:xfrm>
           <a:prstGeom prst="rect">
             <a:avLst/>
@@ -9677,6 +9886,7 @@
               </a:defRPr>
             </a:pPr>
             <a:r>
+              <a:rPr/>
               <a:t>AIを「答え合わせ」に使うと、自分の仮説をAIに確認させるだけになる</a:t>
             </a:r>
           </a:p>
@@ -9691,7 +9901,7 @@
         <p:spPr>
           <a:xfrm>
             <a:off x="1097280" y="5486400"/>
-            <a:ext cx="9144000" cy="365760"/>
+            <a:ext cx="9144000" cy="375920"/>
           </a:xfrm>
           <a:prstGeom prst="rect">
             <a:avLst/>
@@ -9712,6 +9922,7 @@
               </a:defRPr>
             </a:pPr>
             <a:r>
+              <a:rPr/>
               <a:t>→ アンカリングバイアスを増強してしまう</a:t>
             </a:r>
           </a:p>
@@ -9773,6 +9984,7 @@
               </a:defRPr>
             </a:pPr>
             <a:r>
+              <a:rPr/>
               <a:t>Learning Design Lab  |  2026-03-25  |  AIは診断を助けるか？</a:t>
             </a:r>
           </a:p>
@@ -9787,7 +9999,7 @@
         <p:spPr>
           <a:xfrm>
             <a:off x="731520" y="365760"/>
-            <a:ext cx="10058400" cy="548640"/>
+            <a:ext cx="10058400" cy="660400"/>
           </a:xfrm>
           <a:prstGeom prst="rect">
             <a:avLst/>
@@ -9808,6 +10020,7 @@
               </a:defRPr>
             </a:pPr>
             <a:r>
+              <a:rPr/>
               <a:t>AIの「正しい使い方」—— 3つの役割</a:t>
             </a:r>
           </a:p>
@@ -9852,7 +10065,9 @@
           <a:bodyPr rtlCol="0" anchor="ctr"/>
           <a:lstStyle/>
           <a:p>
-            <a:pPr algn="ctr"/>
+            <a:pPr algn="ctr">
+              <a:defRPr/>
+            </a:pPr>
           </a:p>
         </p:txBody>
       </p:sp>
@@ -9886,6 +10101,7 @@
               </a:defRPr>
             </a:pPr>
             <a:r>
+              <a:rPr/>
               <a:t>1</a:t>
             </a:r>
           </a:p>
@@ -9921,6 +10137,7 @@
               </a:defRPr>
             </a:pPr>
             <a:r>
+              <a:rPr/>
               <a:t>Framework Coach（枠組みコーチ）</a:t>
             </a:r>
           </a:p>
@@ -9956,10 +10173,12 @@
               </a:defRPr>
             </a:pPr>
             <a:r>
+              <a:rPr/>
               <a:t>「この症例で見落としている鑑別は？」</a:t>
             </a:r>
             <a:br/>
             <a:r>
+              <a:rPr/>
               <a:t>と構造化を促す</a:t>
             </a:r>
           </a:p>
@@ -10004,7 +10223,9 @@
           <a:bodyPr rtlCol="0" anchor="ctr"/>
           <a:lstStyle/>
           <a:p>
-            <a:pPr algn="ctr"/>
+            <a:pPr algn="ctr">
+              <a:defRPr/>
+            </a:pPr>
           </a:p>
         </p:txBody>
       </p:sp>
@@ -10038,6 +10259,7 @@
               </a:defRPr>
             </a:pPr>
             <a:r>
+              <a:rPr/>
               <a:t>2</a:t>
             </a:r>
           </a:p>
@@ -10073,6 +10295,7 @@
               </a:defRPr>
             </a:pPr>
             <a:r>
+              <a:rPr/>
               <a:t>Socratic Guide（ソクラテス的ガイド）</a:t>
             </a:r>
           </a:p>
@@ -10108,10 +10331,12 @@
               </a:defRPr>
             </a:pPr>
             <a:r>
+              <a:rPr/>
               <a:t>「なぜその診断だと思いますか？他の可能性は？」</a:t>
             </a:r>
             <a:br/>
             <a:r>
+              <a:rPr/>
               <a:t>と問いを立てる</a:t>
             </a:r>
           </a:p>
@@ -10156,7 +10381,9 @@
           <a:bodyPr rtlCol="0" anchor="ctr"/>
           <a:lstStyle/>
           <a:p>
-            <a:pPr algn="ctr"/>
+            <a:pPr algn="ctr">
+              <a:defRPr/>
+            </a:pPr>
           </a:p>
         </p:txBody>
       </p:sp>
@@ -10190,6 +10417,7 @@
               </a:defRPr>
             </a:pPr>
             <a:r>
+              <a:rPr/>
               <a:t>3</a:t>
             </a:r>
           </a:p>
@@ -10225,6 +10453,7 @@
               </a:defRPr>
             </a:pPr>
             <a:r>
+              <a:rPr/>
               <a:t>Red Team Partner（レッドチーム）</a:t>
             </a:r>
           </a:p>
@@ -10260,10 +10489,12 @@
               </a:defRPr>
             </a:pPr>
             <a:r>
+              <a:rPr/>
               <a:t>「あなたの診断が間違っているとしたら、</a:t>
             </a:r>
             <a:br/>
             <a:r>
+              <a:rPr/>
               <a:t>最も危険な見逃しは？」と反論する</a:t>
             </a:r>
           </a:p>
@@ -10308,7 +10539,9 @@
           <a:bodyPr rtlCol="0" anchor="ctr"/>
           <a:lstStyle/>
           <a:p>
-            <a:pPr algn="ctr"/>
+            <a:pPr algn="ctr">
+              <a:defRPr/>
+            </a:pPr>
           </a:p>
         </p:txBody>
       </p:sp>
@@ -10342,6 +10575,7 @@
               </a:defRPr>
             </a:pPr>
             <a:r>
+              <a:rPr/>
               <a:t>AIは「答えを出す道具」ではなく「問いを立てる鏡」として使うと効果的</a:t>
             </a:r>
           </a:p>
@@ -10403,6 +10637,7 @@
               </a:defRPr>
             </a:pPr>
             <a:r>
+              <a:rPr/>
               <a:t>Learning Design Lab  |  2026-03-25  |  AIは診断を助けるか？</a:t>
             </a:r>
           </a:p>
@@ -10417,7 +10652,7 @@
         <p:spPr>
           <a:xfrm>
             <a:off x="731520" y="365760"/>
-            <a:ext cx="10058400" cy="548640"/>
+            <a:ext cx="10058400" cy="660400"/>
           </a:xfrm>
           <a:prstGeom prst="rect">
             <a:avLst/>
@@ -10438,6 +10673,7 @@
               </a:defRPr>
             </a:pPr>
             <a:r>
+              <a:rPr/>
               <a:t>ハンズオン体験（5分）</a:t>
             </a:r>
           </a:p>
@@ -10451,8 +10687,8 @@
         </p:nvSpPr>
         <p:spPr>
           <a:xfrm>
-            <a:off x="731520" y="1005840"/>
-            <a:ext cx="10058400" cy="365760"/>
+            <a:off x="731520" y="1044448"/>
+            <a:ext cx="10058400" cy="411479"/>
           </a:xfrm>
           <a:prstGeom prst="rect">
             <a:avLst/>
@@ -10473,6 +10709,7 @@
               </a:defRPr>
             </a:pPr>
             <a:r>
+              <a:rPr/>
               <a:t>ペアワーク: AIに問診させてみよう</a:t>
             </a:r>
           </a:p>
@@ -10487,7 +10724,7 @@
         <p:spPr>
           <a:xfrm>
             <a:off x="731520" y="1463040"/>
-            <a:ext cx="10058400" cy="365760"/>
+            <a:ext cx="10058400" cy="375920"/>
           </a:xfrm>
           <a:prstGeom prst="rect">
             <a:avLst/>
@@ -10508,6 +10745,7 @@
               </a:defRPr>
             </a:pPr>
             <a:r>
+              <a:rPr/>
               <a:t>症例: 45歳女性、2週間前からの倦怠感と微熱</a:t>
             </a:r>
           </a:p>
@@ -10543,6 +10781,7 @@
               </a:defRPr>
             </a:pPr>
             <a:r>
+              <a:rPr/>
               <a:t>  1.  Aさん: ChatGPT/Claudeに「患者役」をさせて問診（2分）</a:t>
             </a:r>
           </a:p>
@@ -10578,6 +10817,7 @@
               </a:defRPr>
             </a:pPr>
             <a:r>
+              <a:rPr/>
               <a:t>  2.  Bさん: AIに「ソクラテス的ガイド」として鑑別診断を検証（2分）</a:t>
             </a:r>
           </a:p>
@@ -10613,6 +10853,7 @@
               </a:defRPr>
             </a:pPr>
             <a:r>
+              <a:rPr/>
               <a:t>  3.  体験を比較: どちらが「考えさせられた」か？（1分）</a:t>
             </a:r>
           </a:p>
@@ -10657,7 +10898,9 @@
           <a:bodyPr rtlCol="0" anchor="ctr"/>
           <a:lstStyle/>
           <a:p>
-            <a:pPr algn="ctr"/>
+            <a:pPr algn="ctr">
+              <a:defRPr/>
+            </a:pPr>
           </a:p>
         </p:txBody>
       </p:sp>
@@ -10670,7 +10913,7 @@
         <p:spPr>
           <a:xfrm>
             <a:off x="914400" y="4160520"/>
-            <a:ext cx="4572000" cy="274320"/>
+            <a:ext cx="4572000" cy="304799"/>
           </a:xfrm>
           <a:prstGeom prst="rect">
             <a:avLst/>
@@ -10691,6 +10934,7 @@
               </a:defRPr>
             </a:pPr>
             <a:r>
+              <a:rPr/>
               <a:t>プロンプト例（患者役）</a:t>
             </a:r>
           </a:p>
@@ -10726,22 +10970,27 @@
               </a:defRPr>
             </a:pPr>
             <a:r>
+              <a:rPr/>
               <a:t>あなたは45歳女性の患者です。</a:t>
             </a:r>
             <a:br/>
             <a:r>
+              <a:rPr/>
               <a:t>2週間前からの倦怠感と微熱で</a:t>
             </a:r>
             <a:br/>
             <a:r>
+              <a:rPr/>
               <a:t>受診しました。医学生の問診練習に</a:t>
             </a:r>
             <a:br/>
             <a:r>
+              <a:rPr/>
               <a:t>協力してください。質問されるまで</a:t>
             </a:r>
             <a:br/>
             <a:r>
+              <a:rPr/>
               <a:t>情報を出さないでください。</a:t>
             </a:r>
           </a:p>
@@ -10786,7 +11035,9 @@
           <a:bodyPr rtlCol="0" anchor="ctr"/>
           <a:lstStyle/>
           <a:p>
-            <a:pPr algn="ctr"/>
+            <a:pPr algn="ctr">
+              <a:defRPr/>
+            </a:pPr>
           </a:p>
         </p:txBody>
       </p:sp>
@@ -10799,7 +11050,7 @@
         <p:spPr>
           <a:xfrm>
             <a:off x="6400800" y="4160520"/>
-            <a:ext cx="4572000" cy="274320"/>
+            <a:ext cx="4572000" cy="304799"/>
           </a:xfrm>
           <a:prstGeom prst="rect">
             <a:avLst/>
@@ -10820,6 +11071,7 @@
               </a:defRPr>
             </a:pPr>
             <a:r>
+              <a:rPr/>
               <a:t>プロンプト例（ソクラテス的ガイド）</a:t>
             </a:r>
           </a:p>
@@ -10855,22 +11107,27 @@
               </a:defRPr>
             </a:pPr>
             <a:r>
+              <a:rPr/>
               <a:t>私は研修医です。45歳女性、倦怠感</a:t>
             </a:r>
             <a:br/>
             <a:r>
+              <a:rPr/>
               <a:t>と微熱の患者を診ています。私の鑑別</a:t>
             </a:r>
             <a:br/>
             <a:r>
+              <a:rPr/>
               <a:t>診断に対して、見落としている可能性</a:t>
             </a:r>
             <a:br/>
             <a:r>
+              <a:rPr/>
               <a:t>をソクラテス的に問いかけてください。</a:t>
             </a:r>
             <a:br/>
             <a:r>
+              <a:rPr/>
               <a:t>答えは教えないでください。</a:t>
             </a:r>
           </a:p>
@@ -10932,6 +11189,7 @@
               </a:defRPr>
             </a:pPr>
             <a:r>
+              <a:rPr/>
               <a:t>Learning Design Lab  |  2026-03-25  |  AIは診断を助けるか？</a:t>
             </a:r>
           </a:p>
@@ -10946,7 +11204,7 @@
         <p:spPr>
           <a:xfrm>
             <a:off x="731520" y="365760"/>
-            <a:ext cx="10972800" cy="548640"/>
+            <a:ext cx="10972800" cy="589279"/>
           </a:xfrm>
           <a:prstGeom prst="rect">
             <a:avLst/>
@@ -10967,6 +11225,7 @@
               </a:defRPr>
             </a:pPr>
             <a:r>
+              <a:rPr/>
               <a:t>AI仮想患者のエビデンス — 何が分かっているか</a:t>
             </a:r>
           </a:p>
@@ -11509,7 +11768,9 @@
           <a:bodyPr rtlCol="0" anchor="ctr"/>
           <a:lstStyle/>
           <a:p>
-            <a:pPr algn="ctr"/>
+            <a:pPr algn="ctr">
+              <a:defRPr/>
+            </a:pPr>
           </a:p>
         </p:txBody>
       </p:sp>
@@ -11543,6 +11804,7 @@
               </a:defRPr>
             </a:pPr>
             <a:r>
+              <a:rPr/>
               <a:t>2つの独立した研究が同じ結論 → 現在のLLM技術の構造的限界</a:t>
             </a:r>
           </a:p>
@@ -11587,7 +11849,9 @@
           <a:bodyPr rtlCol="0" anchor="ctr"/>
           <a:lstStyle/>
           <a:p>
-            <a:pPr algn="ctr"/>
+            <a:pPr algn="ctr">
+              <a:defRPr/>
+            </a:pPr>
           </a:p>
         </p:txBody>
       </p:sp>
@@ -11621,6 +11885,7 @@
               </a:defRPr>
             </a:pPr>
             <a:r>
+              <a:rPr/>
               <a:t>機能的忠実度: 臨床シナリオの正確さ（症状・検査値が医学的に正しいか）</a:t>
             </a:r>
           </a:p>
@@ -11665,7 +11930,9 @@
           <a:bodyPr rtlCol="0" anchor="ctr"/>
           <a:lstStyle/>
           <a:p>
-            <a:pPr algn="ctr"/>
+            <a:pPr algn="ctr">
+              <a:defRPr/>
+            </a:pPr>
           </a:p>
         </p:txBody>
       </p:sp>
@@ -11699,6 +11966,7 @@
               </a:defRPr>
             </a:pPr>
             <a:r>
+              <a:rPr/>
               <a:t>会話的忠実度: 人間の会話らしさ（自然な間、感情表現、非言語的要素）</a:t>
             </a:r>
           </a:p>
